--- a/docs/solution_presentation.pptx
+++ b/docs/solution_presentation.pptx
@@ -226,13 +226,13 @@
                 <c:formatCode>General</c:formatCode>
                 <c:ptCount val="3"/>
                 <c:pt idx="0">
-                  <c:v>35</c:v>
+                  <c:v>44</c:v>
                 </c:pt>
                 <c:pt idx="1">
-                  <c:v>67</c:v>
+                  <c:v>72</c:v>
                 </c:pt>
                 <c:pt idx="2">
-                  <c:v>30</c:v>
+                  <c:v>32</c:v>
                 </c:pt>
               </c:numCache>
             </c:numRef>
@@ -309,7 +309,7 @@
                 <c:formatCode>General</c:formatCode>
                 <c:ptCount val="3"/>
                 <c:pt idx="0">
-                  <c:v>2</c:v>
+                  <c:v>1</c:v>
                 </c:pt>
                 <c:pt idx="1">
                   <c:v>6</c:v>
@@ -392,13 +392,13 @@
                 <c:formatCode>General</c:formatCode>
                 <c:ptCount val="3"/>
                 <c:pt idx="0">
-                  <c:v>23</c:v>
+                  <c:v>15</c:v>
                 </c:pt>
                 <c:pt idx="1">
-                  <c:v>27</c:v>
+                  <c:v>22</c:v>
                 </c:pt>
                 <c:pt idx="2">
-                  <c:v>10</c:v>
+                  <c:v>8</c:v>
                 </c:pt>
               </c:numCache>
             </c:numRef>
@@ -479,7 +479,7 @@
         <c:axId val="2094734552"/>
         <c:scaling>
           <c:orientation val="minMax"/>
-          <c:max val="75"/>
+          <c:max val="80"/>
         </c:scaling>
         <c:delete val="0"/>
         <c:axPos val="l"/>
@@ -3991,7 +3991,7 @@
                 <a:ea typeface="Calibri" pitchFamily="34" charset="-122"/>
                 <a:cs typeface="Calibri" pitchFamily="34" charset="-120"/>
               </a:rPr>
-              <a:t>Found extraction and validation had drifted to two different sets of field lookups, and unified them</a:t>
+              <a:t>Found extraction and validation had drifted to two different field lookups, and unified them</a:t>
             </a:r>
             <a:endParaRPr lang="en-US" sz="1300" dirty="0"/>
           </a:p>
@@ -5005,7 +5005,7 @@
                 <a:ea typeface="Cambria" pitchFamily="34" charset="-122"/>
                 <a:cs typeface="Cambria" pitchFamily="34" charset="-120"/>
               </a:rPr>
-              <a:t>132</a:t>
+              <a:t>148</a:t>
             </a:r>
             <a:endParaRPr lang="en-US" sz="4000" dirty="0"/>
           </a:p>
@@ -5110,7 +5110,7 @@
                 <a:ea typeface="Cambria" pitchFamily="34" charset="-122"/>
                 <a:cs typeface="Cambria" pitchFamily="34" charset="-120"/>
               </a:rPr>
-              <a:t>8</a:t>
+              <a:t>7</a:t>
             </a:r>
             <a:endParaRPr lang="en-US" sz="4000" dirty="0"/>
           </a:p>
@@ -5215,7 +5215,7 @@
                 <a:ea typeface="Cambria" pitchFamily="34" charset="-122"/>
                 <a:cs typeface="Cambria" pitchFamily="34" charset="-120"/>
               </a:rPr>
-              <a:t>60</a:t>
+              <a:t>45</a:t>
             </a:r>
             <a:endParaRPr lang="en-US" sz="4000" dirty="0"/>
           </a:p>

--- a/docs/solution_presentation.pptx
+++ b/docs/solution_presentation.pptx
@@ -4923,7 +4923,7 @@
                 <a:ea typeface="Calibri" pitchFamily="34" charset="-122"/>
                 <a:cs typeface="Calibri" pitchFamily="34" charset="-120"/>
               </a:rPr>
-              <a:t>All 30 statements in the provided dataset (2017–2026), 200 financial checks</a:t>
+              <a:t>All 50 documents in the provided dataset, 297 financial checks</a:t>
             </a:r>
             <a:endParaRPr lang="en-US" sz="1500" dirty="0"/>
           </a:p>
@@ -4971,6 +4971,10 @@
             <a:prstDash val="solid"/>
           </a:ln>
         </p:spPr>
+        <p:txBody>
+          <a:bodyPr/>
+          <a:p/>
+        </p:txBody>
       </p:sp>
       <p:sp>
         <p:nvSpPr>
@@ -5005,7 +5009,7 @@
                 <a:ea typeface="Cambria" pitchFamily="34" charset="-122"/>
                 <a:cs typeface="Cambria" pitchFamily="34" charset="-120"/>
               </a:rPr>
-              <a:t>148</a:t>
+              <a:t>228</a:t>
             </a:r>
             <a:endParaRPr lang="en-US" sz="4000" dirty="0"/>
           </a:p>
@@ -5076,6 +5080,10 @@
             <a:prstDash val="solid"/>
           </a:ln>
         </p:spPr>
+        <p:txBody>
+          <a:bodyPr/>
+          <a:p/>
+        </p:txBody>
       </p:sp>
       <p:sp>
         <p:nvSpPr>
@@ -5110,7 +5118,7 @@
                 <a:ea typeface="Cambria" pitchFamily="34" charset="-122"/>
                 <a:cs typeface="Cambria" pitchFamily="34" charset="-120"/>
               </a:rPr>
-              <a:t>7</a:t>
+              <a:t>2</a:t>
             </a:r>
             <a:endParaRPr lang="en-US" sz="4000" dirty="0"/>
           </a:p>
@@ -5149,7 +5157,7 @@
                 <a:ea typeface="Calibri" pitchFamily="34" charset="-122"/>
                 <a:cs typeface="Calibri" pitchFamily="34" charset="-120"/>
               </a:rPr>
-              <a:t>flagged as discrepancies</a:t>
+              <a:t>genuine discrepancies, verified by hand</a:t>
             </a:r>
             <a:endParaRPr lang="en-US" sz="1200" dirty="0"/>
           </a:p>
@@ -5181,6 +5189,10 @@
             <a:prstDash val="solid"/>
           </a:ln>
         </p:spPr>
+        <p:txBody>
+          <a:bodyPr/>
+          <a:p/>
+        </p:txBody>
       </p:sp>
       <p:sp>
         <p:nvSpPr>
@@ -5215,7 +5227,7 @@
                 <a:ea typeface="Cambria" pitchFamily="34" charset="-122"/>
                 <a:cs typeface="Cambria" pitchFamily="34" charset="-120"/>
               </a:rPr>
-              <a:t>45</a:t>
+              <a:t>67</a:t>
             </a:r>
             <a:endParaRPr lang="en-US" sz="4000" dirty="0"/>
           </a:p>
@@ -5254,7 +5266,7 @@
                 <a:ea typeface="Calibri" pitchFamily="34" charset="-122"/>
                 <a:cs typeface="Calibri" pitchFamily="34" charset="-120"/>
               </a:rPr>
-              <a:t>not applicable — unreadable scans</a:t>
+              <a:t>not applicable — nothing to reconcile</a:t>
             </a:r>
             <a:endParaRPr lang="en-US" sz="1200" dirty="0"/>
           </a:p>
@@ -5296,7 +5308,7 @@
                 <a:ea typeface="Calibri" pitchFamily="34" charset="-122"/>
                 <a:cs typeface="Calibri" pitchFamily="34" charset="-120"/>
               </a:rPr>
-              <a:t>Clean scans reconcile fully; the not-applicable results concentrate in the 2020–2022 scans where OCR cannot recover row labels.</a:t>
+              <a:t>Every statement check reconciles. The two failures were read back against the source images and are real: a receipt whose items total $3,480 against a printed $5,257, and one whose change is RM 2.00 short. Not-applicable results concentrate in the 2020–2022 scans, where OCR cannot recover row labels.</a:t>
             </a:r>
             <a:endParaRPr lang="en-US" sz="1050" dirty="0"/>
           </a:p>

--- a/docs/solution_presentation.pptx
+++ b/docs/solution_presentation.pptx
@@ -4923,7 +4923,7 @@
                 <a:ea typeface="Calibri" pitchFamily="34" charset="-122"/>
                 <a:cs typeface="Calibri" pitchFamily="34" charset="-120"/>
               </a:rPr>
-              <a:t>All 50 documents in the provided dataset, 297 financial checks</a:t>
+              <a:t>All 50 documents, 306 financial checks, with the Gemini vision pass</a:t>
             </a:r>
             <a:endParaRPr lang="en-US" sz="1500" dirty="0"/>
           </a:p>
@@ -5009,7 +5009,7 @@
                 <a:ea typeface="Cambria" pitchFamily="34" charset="-122"/>
                 <a:cs typeface="Cambria" pitchFamily="34" charset="-120"/>
               </a:rPr>
-              <a:t>228</a:t>
+              <a:t>261</a:t>
             </a:r>
             <a:endParaRPr lang="en-US" sz="4000" dirty="0"/>
           </a:p>
@@ -5227,7 +5227,7 @@
                 <a:ea typeface="Cambria" pitchFamily="34" charset="-122"/>
                 <a:cs typeface="Cambria" pitchFamily="34" charset="-120"/>
               </a:rPr>
-              <a:t>67</a:t>
+              <a:t>43</a:t>
             </a:r>
             <a:endParaRPr lang="en-US" sz="4000" dirty="0"/>
           </a:p>
@@ -5308,7 +5308,7 @@
                 <a:ea typeface="Calibri" pitchFamily="34" charset="-122"/>
                 <a:cs typeface="Calibri" pitchFamily="34" charset="-120"/>
               </a:rPr>
-              <a:t>Every statement check reconciles. The two failures were read back against the source images and are real: a receipt whose items total $3,480 against a printed $5,257, and one whose change is RM 2.00 short. Not-applicable results concentrate in the 2020–2022 scans, where OCR cannot recover row labels.</a:t>
+              <a:t>Every statement check that can be evaluated now passes. The two failures were read back against the source images and are real: a receipt whose items total $3,480 against a printed $5,257, and one whose change is RM 2.00 short. Deterministic OCR alone scores 230/2/72; the vision pass recovers the rest.</a:t>
             </a:r>
             <a:endParaRPr lang="en-US" sz="1050" dirty="0"/>
           </a:p>
